--- a/M5/Skill-wis/m5-les1/gd-m5-wis-les1.pptx
+++ b/M5/Skill-wis/m5-les1/gd-m5-wis-les1.pptx
@@ -15,24 +15,25 @@
     <p:sldId id="263" r:id="rId9"/>
     <p:sldId id="267" r:id="rId10"/>
     <p:sldId id="268" r:id="rId11"/>
-    <p:sldId id="269" r:id="rId12"/>
-    <p:sldId id="270" r:id="rId13"/>
-    <p:sldId id="271" r:id="rId14"/>
-    <p:sldId id="259" r:id="rId15"/>
-    <p:sldId id="272" r:id="rId16"/>
-    <p:sldId id="273" r:id="rId17"/>
-    <p:sldId id="274" r:id="rId18"/>
-    <p:sldId id="275" r:id="rId19"/>
-    <p:sldId id="276" r:id="rId20"/>
-    <p:sldId id="277" r:id="rId21"/>
-    <p:sldId id="278" r:id="rId22"/>
-    <p:sldId id="279" r:id="rId23"/>
-    <p:sldId id="280" r:id="rId24"/>
-    <p:sldId id="281" r:id="rId25"/>
-    <p:sldId id="283" r:id="rId26"/>
-    <p:sldId id="282" r:id="rId27"/>
-    <p:sldId id="285" r:id="rId28"/>
-    <p:sldId id="286" r:id="rId29"/>
+    <p:sldId id="287" r:id="rId12"/>
+    <p:sldId id="269" r:id="rId13"/>
+    <p:sldId id="270" r:id="rId14"/>
+    <p:sldId id="271" r:id="rId15"/>
+    <p:sldId id="259" r:id="rId16"/>
+    <p:sldId id="272" r:id="rId17"/>
+    <p:sldId id="273" r:id="rId18"/>
+    <p:sldId id="274" r:id="rId19"/>
+    <p:sldId id="275" r:id="rId20"/>
+    <p:sldId id="276" r:id="rId21"/>
+    <p:sldId id="277" r:id="rId22"/>
+    <p:sldId id="278" r:id="rId23"/>
+    <p:sldId id="279" r:id="rId24"/>
+    <p:sldId id="280" r:id="rId25"/>
+    <p:sldId id="281" r:id="rId26"/>
+    <p:sldId id="283" r:id="rId27"/>
+    <p:sldId id="282" r:id="rId28"/>
+    <p:sldId id="285" r:id="rId29"/>
+    <p:sldId id="286" r:id="rId30"/>
   </p:sldIdLst>
   <p:sldSz cx="12192000" cy="6858000"/>
   <p:notesSz cx="6858000" cy="9144000"/>
@@ -131,6 +132,11 @@
       </a:defRPr>
     </a:lvl9pPr>
   </p:defaultTextStyle>
+  <p:extLst>
+    <p:ext uri="{EFAFB233-063F-42B5-8137-9DF3F51BA10A}">
+      <p15:sldGuideLst xmlns:p15="http://schemas.microsoft.com/office/powerpoint/2012/main"/>
+    </p:ext>
+  </p:extLst>
 </p:presentation>
 </file>
 
@@ -2948,7 +2954,7 @@
           <a:p>
             <a:fld id="{7A9C32B3-A71F-433F-9A67-96A1E90EBC75}" type="datetimeFigureOut">
               <a:rPr lang="en-US" smtClean="0"/>
-              <a:t>23-Oct-26</a:t>
+              <a:t>26-Oct-26</a:t>
             </a:fld>
             <a:endParaRPr lang="en-US"/>
           </a:p>
@@ -3148,7 +3154,7 @@
           <a:p>
             <a:fld id="{7A9C32B3-A71F-433F-9A67-96A1E90EBC75}" type="datetimeFigureOut">
               <a:rPr lang="en-US" smtClean="0"/>
-              <a:t>23-Oct-26</a:t>
+              <a:t>26-Oct-26</a:t>
             </a:fld>
             <a:endParaRPr lang="en-US"/>
           </a:p>
@@ -3358,7 +3364,7 @@
           <a:p>
             <a:fld id="{7A9C32B3-A71F-433F-9A67-96A1E90EBC75}" type="datetimeFigureOut">
               <a:rPr lang="en-US" smtClean="0"/>
-              <a:t>23-Oct-26</a:t>
+              <a:t>26-Oct-26</a:t>
             </a:fld>
             <a:endParaRPr lang="en-US"/>
           </a:p>
@@ -3558,7 +3564,7 @@
           <a:p>
             <a:fld id="{7A9C32B3-A71F-433F-9A67-96A1E90EBC75}" type="datetimeFigureOut">
               <a:rPr lang="en-US" smtClean="0"/>
-              <a:t>23-Oct-26</a:t>
+              <a:t>26-Oct-26</a:t>
             </a:fld>
             <a:endParaRPr lang="en-US"/>
           </a:p>
@@ -3834,7 +3840,7 @@
           <a:p>
             <a:fld id="{7A9C32B3-A71F-433F-9A67-96A1E90EBC75}" type="datetimeFigureOut">
               <a:rPr lang="en-US" smtClean="0"/>
-              <a:t>23-Oct-26</a:t>
+              <a:t>26-Oct-26</a:t>
             </a:fld>
             <a:endParaRPr lang="en-US"/>
           </a:p>
@@ -4102,7 +4108,7 @@
           <a:p>
             <a:fld id="{7A9C32B3-A71F-433F-9A67-96A1E90EBC75}" type="datetimeFigureOut">
               <a:rPr lang="en-US" smtClean="0"/>
-              <a:t>23-Oct-26</a:t>
+              <a:t>26-Oct-26</a:t>
             </a:fld>
             <a:endParaRPr lang="en-US"/>
           </a:p>
@@ -4517,7 +4523,7 @@
           <a:p>
             <a:fld id="{7A9C32B3-A71F-433F-9A67-96A1E90EBC75}" type="datetimeFigureOut">
               <a:rPr lang="en-US" smtClean="0"/>
-              <a:t>23-Oct-26</a:t>
+              <a:t>26-Oct-26</a:t>
             </a:fld>
             <a:endParaRPr lang="en-US"/>
           </a:p>
@@ -4659,7 +4665,7 @@
           <a:p>
             <a:fld id="{7A9C32B3-A71F-433F-9A67-96A1E90EBC75}" type="datetimeFigureOut">
               <a:rPr lang="en-US" smtClean="0"/>
-              <a:t>23-Oct-26</a:t>
+              <a:t>26-Oct-26</a:t>
             </a:fld>
             <a:endParaRPr lang="en-US"/>
           </a:p>
@@ -4772,7 +4778,7 @@
           <a:p>
             <a:fld id="{7A9C32B3-A71F-433F-9A67-96A1E90EBC75}" type="datetimeFigureOut">
               <a:rPr lang="en-US" smtClean="0"/>
-              <a:t>23-Oct-26</a:t>
+              <a:t>26-Oct-26</a:t>
             </a:fld>
             <a:endParaRPr lang="en-US"/>
           </a:p>
@@ -5085,7 +5091,7 @@
           <a:p>
             <a:fld id="{7A9C32B3-A71F-433F-9A67-96A1E90EBC75}" type="datetimeFigureOut">
               <a:rPr lang="en-US" smtClean="0"/>
-              <a:t>23-Oct-26</a:t>
+              <a:t>26-Oct-26</a:t>
             </a:fld>
             <a:endParaRPr lang="en-US"/>
           </a:p>
@@ -5374,7 +5380,7 @@
           <a:p>
             <a:fld id="{7A9C32B3-A71F-433F-9A67-96A1E90EBC75}" type="datetimeFigureOut">
               <a:rPr lang="en-US" smtClean="0"/>
-              <a:t>23-Oct-26</a:t>
+              <a:t>26-Oct-26</a:t>
             </a:fld>
             <a:endParaRPr lang="en-US"/>
           </a:p>
@@ -5617,7 +5623,7 @@
           <a:p>
             <a:fld id="{7A9C32B3-A71F-433F-9A67-96A1E90EBC75}" type="datetimeFigureOut">
               <a:rPr lang="en-US" smtClean="0"/>
-              <a:t>23-Oct-26</a:t>
+              <a:t>26-Oct-26</a:t>
             </a:fld>
             <a:endParaRPr lang="en-US"/>
           </a:p>
@@ -6326,16 +6332,63 @@
           <a:lstStyle/>
           <a:p>
             <a:r>
-              <a:rPr lang="nl-NL" sz="2000"/>
-              <a:t>Maak ook in de map PreFab een MonoBehavour-script aan met als naam DraggablePoint</a:t>
-            </a:r>
-          </a:p>
-          <a:p>
-            <a:r>
-              <a:rPr lang="nl-NL" sz="2000"/>
-              <a:t>Koppel het GameObject DraggablePoint aan het Script DraggablePoint</a:t>
-            </a:r>
-            <a:endParaRPr lang="en-US" sz="2000"/>
+              <a:rPr lang="nl-NL" sz="2000" dirty="0"/>
+              <a:t>Maak ook in de map </a:t>
+            </a:r>
+            <a:r>
+              <a:rPr lang="nl-NL" sz="2000" dirty="0" err="1"/>
+              <a:t>PreFab</a:t>
+            </a:r>
+            <a:r>
+              <a:rPr lang="nl-NL" sz="2000" dirty="0"/>
+              <a:t> een </a:t>
+            </a:r>
+            <a:r>
+              <a:rPr lang="nl-NL" sz="2000" dirty="0" err="1"/>
+              <a:t>MonoBehavour</a:t>
+            </a:r>
+            <a:r>
+              <a:rPr lang="nl-NL" sz="2000" dirty="0"/>
+              <a:t>-script aan met als naam </a:t>
+            </a:r>
+            <a:r>
+              <a:rPr lang="nl-NL" sz="2000" dirty="0" err="1">
+                <a:latin typeface="Courier New" panose="02070309020205020404" pitchFamily="49" charset="0"/>
+                <a:cs typeface="Courier New" panose="02070309020205020404" pitchFamily="49" charset="0"/>
+              </a:rPr>
+              <a:t>DraggablePoint</a:t>
+            </a:r>
+            <a:endParaRPr lang="nl-NL" sz="2000" dirty="0">
+              <a:latin typeface="Courier New" panose="02070309020205020404" pitchFamily="49" charset="0"/>
+              <a:cs typeface="Courier New" panose="02070309020205020404" pitchFamily="49" charset="0"/>
+            </a:endParaRPr>
+          </a:p>
+          <a:p>
+            <a:r>
+              <a:rPr lang="nl-NL" sz="2000" dirty="0"/>
+              <a:t>Koppel het </a:t>
+            </a:r>
+            <a:r>
+              <a:rPr lang="nl-NL" sz="2000" dirty="0" err="1"/>
+              <a:t>GameObject</a:t>
+            </a:r>
+            <a:r>
+              <a:rPr lang="nl-NL" sz="2000" dirty="0"/>
+              <a:t> </a:t>
+            </a:r>
+            <a:r>
+              <a:rPr lang="nl-NL" sz="2000" dirty="0" err="1"/>
+              <a:t>DraggablePoint</a:t>
+            </a:r>
+            <a:r>
+              <a:rPr lang="nl-NL" sz="2000" dirty="0"/>
+              <a:t> aan het Script </a:t>
+            </a:r>
+            <a:r>
+              <a:rPr lang="nl-NL" sz="2000" dirty="0" err="1"/>
+              <a:t>DraggablePoint</a:t>
+            </a:r>
+            <a:endParaRPr lang="en-US" sz="2000" dirty="0"/>
           </a:p>
         </p:txBody>
       </p:sp>
@@ -6383,6 +6436,269 @@
 </file>
 
 <file path=ppt/slides/slide11.xml><?xml version="1.0" encoding="utf-8"?>
+<p:sld xmlns:a="http://schemas.openxmlformats.org/drawingml/2006/main" xmlns:r="http://schemas.openxmlformats.org/officeDocument/2006/relationships" xmlns:p="http://schemas.openxmlformats.org/presentationml/2006/main">
+  <p:cSld>
+    <p:spTree>
+      <p:nvGrpSpPr>
+        <p:cNvPr id="1" name=""/>
+        <p:cNvGrpSpPr/>
+        <p:nvPr/>
+      </p:nvGrpSpPr>
+      <p:grpSpPr>
+        <a:xfrm>
+          <a:off x="0" y="0"/>
+          <a:ext cx="0" cy="0"/>
+          <a:chOff x="0" y="0"/>
+          <a:chExt cx="0" cy="0"/>
+        </a:xfrm>
+      </p:grpSpPr>
+      <p:sp>
+        <p:nvSpPr>
+          <p:cNvPr id="2" name="Titel 1">
+            <a:extLst>
+              <a:ext uri="{FF2B5EF4-FFF2-40B4-BE49-F238E27FC236}">
+                <a16:creationId xmlns:a16="http://schemas.microsoft.com/office/drawing/2014/main" id="{7F64C7FB-BAA5-6FD9-1AD8-4550827FE0CD}"/>
+              </a:ext>
+            </a:extLst>
+          </p:cNvPr>
+          <p:cNvSpPr>
+            <a:spLocks noGrp="1"/>
+          </p:cNvSpPr>
+          <p:nvPr>
+            <p:ph type="title"/>
+          </p:nvPr>
+        </p:nvSpPr>
+        <p:spPr/>
+        <p:txBody>
+          <a:bodyPr/>
+          <a:lstStyle/>
+          <a:p>
+            <a:r>
+              <a:rPr lang="nl-NL" dirty="0"/>
+              <a:t>Test </a:t>
+            </a:r>
+            <a:r>
+              <a:rPr lang="nl-NL" dirty="0" err="1"/>
+              <a:t>DraggablePoint</a:t>
+            </a:r>
+            <a:r>
+              <a:rPr lang="nl-NL" dirty="0"/>
+              <a:t> in Exercise1</a:t>
+            </a:r>
+            <a:endParaRPr lang="en-US" dirty="0"/>
+          </a:p>
+        </p:txBody>
+      </p:sp>
+      <p:sp>
+        <p:nvSpPr>
+          <p:cNvPr id="3" name="Tijdelijke aanduiding voor inhoud 2">
+            <a:extLst>
+              <a:ext uri="{FF2B5EF4-FFF2-40B4-BE49-F238E27FC236}">
+                <a16:creationId xmlns:a16="http://schemas.microsoft.com/office/drawing/2014/main" id="{4643DB78-E3C3-6069-4D74-D6E6B57FC360}"/>
+              </a:ext>
+            </a:extLst>
+          </p:cNvPr>
+          <p:cNvSpPr>
+            <a:spLocks noGrp="1"/>
+          </p:cNvSpPr>
+          <p:nvPr>
+            <p:ph idx="1"/>
+          </p:nvPr>
+        </p:nvSpPr>
+        <p:spPr>
+          <a:xfrm>
+            <a:off x="838200" y="1825625"/>
+            <a:ext cx="10429568" cy="4351338"/>
+          </a:xfrm>
+        </p:spPr>
+        <p:txBody>
+          <a:bodyPr/>
+          <a:lstStyle/>
+          <a:p>
+            <a:r>
+              <a:rPr lang="nl-NL" dirty="0"/>
+              <a:t>Wij maken een Klasse Exercise1 om de Klasse </a:t>
+            </a:r>
+            <a:r>
+              <a:rPr lang="nl-NL" dirty="0" err="1"/>
+              <a:t>DraggablePoint</a:t>
+            </a:r>
+            <a:r>
+              <a:rPr lang="nl-NL" dirty="0"/>
+              <a:t> te testen</a:t>
+            </a:r>
+          </a:p>
+          <a:p>
+            <a:pPr lvl="1"/>
+            <a:r>
+              <a:rPr lang="nl-NL" dirty="0"/>
+              <a:t>Maak een in Exercise1 een [</a:t>
+            </a:r>
+            <a:r>
+              <a:rPr lang="nl-NL" dirty="0" err="1"/>
+              <a:t>SerializeField</a:t>
+            </a:r>
+            <a:r>
+              <a:rPr lang="nl-NL" dirty="0"/>
+              <a:t>] met als </a:t>
+            </a:r>
+            <a:r>
+              <a:rPr lang="nl-NL" dirty="0" err="1"/>
+              <a:t>Klassenaam</a:t>
+            </a:r>
+            <a:r>
+              <a:rPr lang="nl-NL" dirty="0"/>
+              <a:t> </a:t>
+            </a:r>
+            <a:r>
+              <a:rPr lang="nl-NL" dirty="0" err="1"/>
+              <a:t>DraggablePoint</a:t>
+            </a:r>
+            <a:endParaRPr lang="nl-NL" dirty="0"/>
+          </a:p>
+          <a:p>
+            <a:pPr lvl="1"/>
+            <a:r>
+              <a:rPr lang="nl-NL" dirty="0"/>
+              <a:t>Selecteer in de </a:t>
+            </a:r>
+            <a:r>
+              <a:rPr lang="nl-NL" dirty="0" err="1"/>
+              <a:t>Hierarchy</a:t>
+            </a:r>
+            <a:r>
+              <a:rPr lang="nl-NL" dirty="0"/>
+              <a:t> de Exercise1 en sleep de </a:t>
+            </a:r>
+            <a:r>
+              <a:rPr lang="nl-NL" dirty="0" err="1"/>
+              <a:t>DraggablePoint</a:t>
+            </a:r>
+            <a:r>
+              <a:rPr lang="nl-NL" dirty="0"/>
+              <a:t> in het </a:t>
+            </a:r>
+            <a:r>
+              <a:rPr lang="nl-NL" dirty="0" err="1"/>
+              <a:t>inputBlok</a:t>
+            </a:r>
+            <a:endParaRPr lang="en-US" dirty="0"/>
+          </a:p>
+        </p:txBody>
+      </p:sp>
+      <p:pic>
+        <p:nvPicPr>
+          <p:cNvPr id="5" name="Afbeelding 4">
+            <a:extLst>
+              <a:ext uri="{FF2B5EF4-FFF2-40B4-BE49-F238E27FC236}">
+                <a16:creationId xmlns:a16="http://schemas.microsoft.com/office/drawing/2014/main" id="{482CF2CF-AA04-DA45-19C3-589D436903A8}"/>
+              </a:ext>
+            </a:extLst>
+          </p:cNvPr>
+          <p:cNvPicPr>
+            <a:picLocks noChangeAspect="1"/>
+          </p:cNvPicPr>
+          <p:nvPr/>
+        </p:nvPicPr>
+        <p:blipFill>
+          <a:blip r:embed="rId2"/>
+          <a:stretch>
+            <a:fillRect/>
+          </a:stretch>
+        </p:blipFill>
+        <p:spPr>
+          <a:xfrm>
+            <a:off x="924232" y="4338028"/>
+            <a:ext cx="3401962" cy="2519972"/>
+          </a:xfrm>
+          <a:prstGeom prst="rect">
+            <a:avLst/>
+          </a:prstGeom>
+        </p:spPr>
+      </p:pic>
+      <p:pic>
+        <p:nvPicPr>
+          <p:cNvPr id="7" name="Afbeelding 6">
+            <a:extLst>
+              <a:ext uri="{FF2B5EF4-FFF2-40B4-BE49-F238E27FC236}">
+                <a16:creationId xmlns:a16="http://schemas.microsoft.com/office/drawing/2014/main" id="{F6E4D2C5-9B2E-4FAE-5D00-E9E2090B8768}"/>
+              </a:ext>
+            </a:extLst>
+          </p:cNvPr>
+          <p:cNvPicPr>
+            <a:picLocks noChangeAspect="1"/>
+          </p:cNvPicPr>
+          <p:nvPr/>
+        </p:nvPicPr>
+        <p:blipFill>
+          <a:blip r:embed="rId3"/>
+          <a:stretch>
+            <a:fillRect/>
+          </a:stretch>
+        </p:blipFill>
+        <p:spPr>
+          <a:xfrm>
+            <a:off x="6761373" y="4001294"/>
+            <a:ext cx="3139712" cy="2712955"/>
+          </a:xfrm>
+          <a:prstGeom prst="rect">
+            <a:avLst/>
+          </a:prstGeom>
+        </p:spPr>
+      </p:pic>
+      <p:cxnSp>
+        <p:nvCxnSpPr>
+          <p:cNvPr id="9" name="Rechte verbindingslijn met pijl 8">
+            <a:extLst>
+              <a:ext uri="{FF2B5EF4-FFF2-40B4-BE49-F238E27FC236}">
+                <a16:creationId xmlns:a16="http://schemas.microsoft.com/office/drawing/2014/main" id="{7880F8F9-9289-AF03-45AF-CAAB27363CFC}"/>
+              </a:ext>
+            </a:extLst>
+          </p:cNvPr>
+          <p:cNvCxnSpPr/>
+          <p:nvPr/>
+        </p:nvCxnSpPr>
+        <p:spPr>
+          <a:xfrm>
+            <a:off x="4247535" y="5161935"/>
+            <a:ext cx="2576052" cy="1015028"/>
+          </a:xfrm>
+          <a:prstGeom prst="straightConnector1">
+            <a:avLst/>
+          </a:prstGeom>
+          <a:ln w="76200">
+            <a:tailEnd type="triangle"/>
+          </a:ln>
+        </p:spPr>
+        <p:style>
+          <a:lnRef idx="2">
+            <a:schemeClr val="accent1"/>
+          </a:lnRef>
+          <a:fillRef idx="0">
+            <a:schemeClr val="accent1"/>
+          </a:fillRef>
+          <a:effectRef idx="1">
+            <a:schemeClr val="accent1"/>
+          </a:effectRef>
+          <a:fontRef idx="minor">
+            <a:schemeClr val="tx1"/>
+          </a:fontRef>
+        </p:style>
+      </p:cxnSp>
+    </p:spTree>
+    <p:extLst>
+      <p:ext uri="{BB962C8B-B14F-4D97-AF65-F5344CB8AC3E}">
+        <p14:creationId xmlns:p14="http://schemas.microsoft.com/office/powerpoint/2010/main" val="3144848152"/>
+      </p:ext>
+    </p:extLst>
+  </p:cSld>
+  <p:clrMapOvr>
+    <a:masterClrMapping/>
+  </p:clrMapOvr>
+</p:sld>
+</file>
+
+<file path=ppt/slides/slide12.xml><?xml version="1.0" encoding="utf-8"?>
 <p:sld xmlns:a="http://schemas.openxmlformats.org/drawingml/2006/main" xmlns:r="http://schemas.openxmlformats.org/officeDocument/2006/relationships" xmlns:p="http://schemas.openxmlformats.org/presentationml/2006/main">
   <p:cSld>
     <p:bg>
@@ -6695,7 +7011,7 @@
 </p:sld>
 </file>
 
-<file path=ppt/slides/slide12.xml><?xml version="1.0" encoding="utf-8"?>
+<file path=ppt/slides/slide13.xml><?xml version="1.0" encoding="utf-8"?>
 <p:sld xmlns:a="http://schemas.openxmlformats.org/drawingml/2006/main" xmlns:r="http://schemas.openxmlformats.org/officeDocument/2006/relationships" xmlns:p="http://schemas.openxmlformats.org/presentationml/2006/main">
   <p:cSld>
     <p:bg>
@@ -7585,7 +7901,7 @@
 </p:sld>
 </file>
 
-<file path=ppt/slides/slide13.xml><?xml version="1.0" encoding="utf-8"?>
+<file path=ppt/slides/slide14.xml><?xml version="1.0" encoding="utf-8"?>
 <p:sld xmlns:a="http://schemas.openxmlformats.org/drawingml/2006/main" xmlns:r="http://schemas.openxmlformats.org/officeDocument/2006/relationships" xmlns:p="http://schemas.openxmlformats.org/presentationml/2006/main">
   <p:cSld>
     <p:bg>
@@ -7874,7 +8190,7 @@
               <a:buNone/>
             </a:pPr>
             <a:r>
-              <a:rPr lang="en-US" sz="2000" kern="1200">
+              <a:rPr lang="en-US" sz="2000" kern="1200" dirty="0">
                 <a:solidFill>
                   <a:schemeClr val="tx1"/>
                 </a:solidFill>
@@ -7882,7 +8198,83 @@
                 <a:ea typeface="+mn-ea"/>
                 <a:cs typeface="+mn-cs"/>
               </a:rPr>
-              <a:t>Maak in de map AMP een nieuwe Input Action met als naam AMP-actions</a:t>
+              <a:t>Maak in de map AMP </a:t>
+            </a:r>
+            <a:r>
+              <a:rPr lang="en-US" sz="2000" kern="1200" dirty="0" err="1">
+                <a:solidFill>
+                  <a:schemeClr val="tx1"/>
+                </a:solidFill>
+                <a:latin typeface="+mn-lt"/>
+                <a:ea typeface="+mn-ea"/>
+                <a:cs typeface="+mn-cs"/>
+              </a:rPr>
+              <a:t>een</a:t>
+            </a:r>
+            <a:r>
+              <a:rPr lang="en-US" sz="2000" kern="1200" dirty="0">
+                <a:solidFill>
+                  <a:schemeClr val="tx1"/>
+                </a:solidFill>
+                <a:latin typeface="+mn-lt"/>
+                <a:ea typeface="+mn-ea"/>
+                <a:cs typeface="+mn-cs"/>
+              </a:rPr>
+              <a:t> </a:t>
+            </a:r>
+            <a:r>
+              <a:rPr lang="en-US" sz="2000" kern="1200" dirty="0" err="1">
+                <a:solidFill>
+                  <a:schemeClr val="tx1"/>
+                </a:solidFill>
+                <a:latin typeface="+mn-lt"/>
+                <a:ea typeface="+mn-ea"/>
+                <a:cs typeface="+mn-cs"/>
+              </a:rPr>
+              <a:t>nieuwe</a:t>
+            </a:r>
+            <a:r>
+              <a:rPr lang="en-US" sz="2000" kern="1200" dirty="0">
+                <a:solidFill>
+                  <a:schemeClr val="tx1"/>
+                </a:solidFill>
+                <a:latin typeface="+mn-lt"/>
+                <a:ea typeface="+mn-ea"/>
+                <a:cs typeface="+mn-cs"/>
+              </a:rPr>
+              <a:t> Input Action met </a:t>
+            </a:r>
+            <a:r>
+              <a:rPr lang="en-US" sz="2000" kern="1200" dirty="0" err="1">
+                <a:solidFill>
+                  <a:schemeClr val="tx1"/>
+                </a:solidFill>
+                <a:latin typeface="+mn-lt"/>
+                <a:ea typeface="+mn-ea"/>
+                <a:cs typeface="+mn-cs"/>
+              </a:rPr>
+              <a:t>als</a:t>
+            </a:r>
+            <a:r>
+              <a:rPr lang="en-US" sz="2000" kern="1200" dirty="0">
+                <a:solidFill>
+                  <a:schemeClr val="tx1"/>
+                </a:solidFill>
+                <a:latin typeface="+mn-lt"/>
+                <a:ea typeface="+mn-ea"/>
+                <a:cs typeface="+mn-cs"/>
+              </a:rPr>
+              <a:t> naam </a:t>
+            </a:r>
+            <a:r>
+              <a:rPr lang="en-US" sz="2000" kern="1200" dirty="0">
+                <a:solidFill>
+                  <a:schemeClr val="tx1"/>
+                </a:solidFill>
+                <a:latin typeface="Courier New" panose="02070309020205020404" pitchFamily="49" charset="0"/>
+                <a:cs typeface="Courier New" panose="02070309020205020404" pitchFamily="49" charset="0"/>
+              </a:rPr>
+              <a:t>AMP-actions</a:t>
             </a:r>
           </a:p>
         </p:txBody>
@@ -7930,7 +8322,7 @@
 </p:sld>
 </file>
 
-<file path=ppt/slides/slide14.xml><?xml version="1.0" encoding="utf-8"?>
+<file path=ppt/slides/slide15.xml><?xml version="1.0" encoding="utf-8"?>
 <p:sld xmlns:a="http://schemas.openxmlformats.org/drawingml/2006/main" xmlns:r="http://schemas.openxmlformats.org/officeDocument/2006/relationships" xmlns:p="http://schemas.openxmlformats.org/presentationml/2006/main">
   <p:cSld>
     <p:bg>
@@ -8389,7 +8781,7 @@
 </p:sld>
 </file>
 
-<file path=ppt/slides/slide15.xml><?xml version="1.0" encoding="utf-8"?>
+<file path=ppt/slides/slide16.xml><?xml version="1.0" encoding="utf-8"?>
 <p:sld xmlns:a="http://schemas.openxmlformats.org/drawingml/2006/main" xmlns:r="http://schemas.openxmlformats.org/officeDocument/2006/relationships" xmlns:p="http://schemas.openxmlformats.org/presentationml/2006/main">
   <p:cSld>
     <p:spTree>
@@ -8532,7 +8924,7 @@
 </p:sld>
 </file>
 
-<file path=ppt/slides/slide16.xml><?xml version="1.0" encoding="utf-8"?>
+<file path=ppt/slides/slide17.xml><?xml version="1.0" encoding="utf-8"?>
 <p:sld xmlns:a="http://schemas.openxmlformats.org/drawingml/2006/main" xmlns:r="http://schemas.openxmlformats.org/officeDocument/2006/relationships" xmlns:p="http://schemas.openxmlformats.org/presentationml/2006/main">
   <p:cSld>
     <p:bg>
@@ -9091,7 +9483,7 @@
 </p:sld>
 </file>
 
-<file path=ppt/slides/slide17.xml><?xml version="1.0" encoding="utf-8"?>
+<file path=ppt/slides/slide18.xml><?xml version="1.0" encoding="utf-8"?>
 <p:sld xmlns:a="http://schemas.openxmlformats.org/drawingml/2006/main" xmlns:r="http://schemas.openxmlformats.org/officeDocument/2006/relationships" xmlns:p="http://schemas.openxmlformats.org/presentationml/2006/main">
   <p:cSld>
     <p:bg>
@@ -9426,7 +9818,7 @@
 </p:sld>
 </file>
 
-<file path=ppt/slides/slide18.xml><?xml version="1.0" encoding="utf-8"?>
+<file path=ppt/slides/slide19.xml><?xml version="1.0" encoding="utf-8"?>
 <p:sld xmlns:a="http://schemas.openxmlformats.org/drawingml/2006/main" xmlns:r="http://schemas.openxmlformats.org/officeDocument/2006/relationships" xmlns:p="http://schemas.openxmlformats.org/presentationml/2006/main">
   <p:cSld>
     <p:bg>
@@ -10190,7 +10582,128 @@
 </p:sld>
 </file>
 
-<file path=ppt/slides/slide19.xml><?xml version="1.0" encoding="utf-8"?>
+<file path=ppt/slides/slide2.xml><?xml version="1.0" encoding="utf-8"?>
+<p:sld xmlns:a="http://schemas.openxmlformats.org/drawingml/2006/main" xmlns:r="http://schemas.openxmlformats.org/officeDocument/2006/relationships" xmlns:p="http://schemas.openxmlformats.org/presentationml/2006/main">
+  <p:cSld>
+    <p:spTree>
+      <p:nvGrpSpPr>
+        <p:cNvPr id="1" name=""/>
+        <p:cNvGrpSpPr/>
+        <p:nvPr/>
+      </p:nvGrpSpPr>
+      <p:grpSpPr>
+        <a:xfrm>
+          <a:off x="0" y="0"/>
+          <a:ext cx="0" cy="0"/>
+          <a:chOff x="0" y="0"/>
+          <a:chExt cx="0" cy="0"/>
+        </a:xfrm>
+      </p:grpSpPr>
+      <p:sp>
+        <p:nvSpPr>
+          <p:cNvPr id="2" name="Titel 1">
+            <a:extLst>
+              <a:ext uri="{FF2B5EF4-FFF2-40B4-BE49-F238E27FC236}">
+                <a16:creationId xmlns:a16="http://schemas.microsoft.com/office/drawing/2014/main" id="{358311E2-FAF0-A779-4571-B6FEEAFD5103}"/>
+              </a:ext>
+            </a:extLst>
+          </p:cNvPr>
+          <p:cNvSpPr>
+            <a:spLocks noGrp="1"/>
+          </p:cNvSpPr>
+          <p:nvPr>
+            <p:ph type="title"/>
+          </p:nvPr>
+        </p:nvSpPr>
+        <p:spPr/>
+        <p:txBody>
+          <a:bodyPr/>
+          <a:lstStyle/>
+          <a:p>
+            <a:r>
+              <a:rPr lang="nl-NL" dirty="0"/>
+              <a:t>Leerdoel</a:t>
+            </a:r>
+            <a:endParaRPr lang="en-US" dirty="0"/>
+          </a:p>
+        </p:txBody>
+      </p:sp>
+      <p:sp>
+        <p:nvSpPr>
+          <p:cNvPr id="3" name="Tijdelijke aanduiding voor inhoud 2">
+            <a:extLst>
+              <a:ext uri="{FF2B5EF4-FFF2-40B4-BE49-F238E27FC236}">
+                <a16:creationId xmlns:a16="http://schemas.microsoft.com/office/drawing/2014/main" id="{0A73B1A0-12E7-27E9-B397-53338C88E6A5}"/>
+              </a:ext>
+            </a:extLst>
+          </p:cNvPr>
+          <p:cNvSpPr>
+            <a:spLocks noGrp="1"/>
+          </p:cNvSpPr>
+          <p:nvPr>
+            <p:ph idx="1"/>
+          </p:nvPr>
+        </p:nvSpPr>
+        <p:spPr/>
+        <p:txBody>
+          <a:bodyPr/>
+          <a:lstStyle/>
+          <a:p>
+            <a:r>
+              <a:rPr lang="nl-NL" dirty="0"/>
+              <a:t>Ontwerpen en realiseren 2D </a:t>
+            </a:r>
+            <a:r>
+              <a:rPr lang="nl-NL" dirty="0" err="1"/>
+              <a:t>draggable</a:t>
+            </a:r>
+            <a:r>
+              <a:rPr lang="nl-NL" dirty="0"/>
+              <a:t> point in </a:t>
+            </a:r>
+            <a:r>
+              <a:rPr lang="nl-NL" dirty="0" err="1"/>
+              <a:t>Unity</a:t>
+            </a:r>
+            <a:endParaRPr lang="nl-NL" dirty="0"/>
+          </a:p>
+          <a:p>
+            <a:r>
+              <a:rPr lang="nl-NL" dirty="0"/>
+              <a:t>Een prefab maken van een de </a:t>
+            </a:r>
+            <a:r>
+              <a:rPr lang="nl-NL" dirty="0" err="1"/>
+              <a:t>draggable</a:t>
+            </a:r>
+            <a:r>
+              <a:rPr lang="nl-NL" dirty="0"/>
+              <a:t> point</a:t>
+            </a:r>
+          </a:p>
+          <a:p>
+            <a:r>
+              <a:rPr lang="nl-NL" dirty="0"/>
+              <a:t>Werken met Input Action</a:t>
+            </a:r>
+            <a:endParaRPr lang="en-US" dirty="0"/>
+          </a:p>
+        </p:txBody>
+      </p:sp>
+    </p:spTree>
+    <p:extLst>
+      <p:ext uri="{BB962C8B-B14F-4D97-AF65-F5344CB8AC3E}">
+        <p14:creationId xmlns:p14="http://schemas.microsoft.com/office/powerpoint/2010/main" val="542638257"/>
+      </p:ext>
+    </p:extLst>
+  </p:cSld>
+  <p:clrMapOvr>
+    <a:masterClrMapping/>
+  </p:clrMapOvr>
+</p:sld>
+</file>
+
+<file path=ppt/slides/slide20.xml><?xml version="1.0" encoding="utf-8"?>
 <p:sld xmlns:a="http://schemas.openxmlformats.org/drawingml/2006/main" xmlns:r="http://schemas.openxmlformats.org/officeDocument/2006/relationships" xmlns:p="http://schemas.openxmlformats.org/presentationml/2006/main">
   <p:cSld>
     <p:spTree>
@@ -10504,128 +11017,7 @@
 </p:sld>
 </file>
 
-<file path=ppt/slides/slide2.xml><?xml version="1.0" encoding="utf-8"?>
-<p:sld xmlns:a="http://schemas.openxmlformats.org/drawingml/2006/main" xmlns:r="http://schemas.openxmlformats.org/officeDocument/2006/relationships" xmlns:p="http://schemas.openxmlformats.org/presentationml/2006/main">
-  <p:cSld>
-    <p:spTree>
-      <p:nvGrpSpPr>
-        <p:cNvPr id="1" name=""/>
-        <p:cNvGrpSpPr/>
-        <p:nvPr/>
-      </p:nvGrpSpPr>
-      <p:grpSpPr>
-        <a:xfrm>
-          <a:off x="0" y="0"/>
-          <a:ext cx="0" cy="0"/>
-          <a:chOff x="0" y="0"/>
-          <a:chExt cx="0" cy="0"/>
-        </a:xfrm>
-      </p:grpSpPr>
-      <p:sp>
-        <p:nvSpPr>
-          <p:cNvPr id="2" name="Titel 1">
-            <a:extLst>
-              <a:ext uri="{FF2B5EF4-FFF2-40B4-BE49-F238E27FC236}">
-                <a16:creationId xmlns:a16="http://schemas.microsoft.com/office/drawing/2014/main" id="{358311E2-FAF0-A779-4571-B6FEEAFD5103}"/>
-              </a:ext>
-            </a:extLst>
-          </p:cNvPr>
-          <p:cNvSpPr>
-            <a:spLocks noGrp="1"/>
-          </p:cNvSpPr>
-          <p:nvPr>
-            <p:ph type="title"/>
-          </p:nvPr>
-        </p:nvSpPr>
-        <p:spPr/>
-        <p:txBody>
-          <a:bodyPr/>
-          <a:lstStyle/>
-          <a:p>
-            <a:r>
-              <a:rPr lang="nl-NL" dirty="0"/>
-              <a:t>Leerdoel</a:t>
-            </a:r>
-            <a:endParaRPr lang="en-US" dirty="0"/>
-          </a:p>
-        </p:txBody>
-      </p:sp>
-      <p:sp>
-        <p:nvSpPr>
-          <p:cNvPr id="3" name="Tijdelijke aanduiding voor inhoud 2">
-            <a:extLst>
-              <a:ext uri="{FF2B5EF4-FFF2-40B4-BE49-F238E27FC236}">
-                <a16:creationId xmlns:a16="http://schemas.microsoft.com/office/drawing/2014/main" id="{0A73B1A0-12E7-27E9-B397-53338C88E6A5}"/>
-              </a:ext>
-            </a:extLst>
-          </p:cNvPr>
-          <p:cNvSpPr>
-            <a:spLocks noGrp="1"/>
-          </p:cNvSpPr>
-          <p:nvPr>
-            <p:ph idx="1"/>
-          </p:nvPr>
-        </p:nvSpPr>
-        <p:spPr/>
-        <p:txBody>
-          <a:bodyPr/>
-          <a:lstStyle/>
-          <a:p>
-            <a:r>
-              <a:rPr lang="nl-NL" dirty="0"/>
-              <a:t>Ontwerpen en realiseren 2D </a:t>
-            </a:r>
-            <a:r>
-              <a:rPr lang="nl-NL" dirty="0" err="1"/>
-              <a:t>draggable</a:t>
-            </a:r>
-            <a:r>
-              <a:rPr lang="nl-NL" dirty="0"/>
-              <a:t> point in </a:t>
-            </a:r>
-            <a:r>
-              <a:rPr lang="nl-NL" dirty="0" err="1"/>
-              <a:t>Unity</a:t>
-            </a:r>
-            <a:endParaRPr lang="nl-NL" dirty="0"/>
-          </a:p>
-          <a:p>
-            <a:r>
-              <a:rPr lang="nl-NL" dirty="0"/>
-              <a:t>Een prefab maken van een de </a:t>
-            </a:r>
-            <a:r>
-              <a:rPr lang="nl-NL" dirty="0" err="1"/>
-              <a:t>draggable</a:t>
-            </a:r>
-            <a:r>
-              <a:rPr lang="nl-NL" dirty="0"/>
-              <a:t> point</a:t>
-            </a:r>
-          </a:p>
-          <a:p>
-            <a:r>
-              <a:rPr lang="nl-NL" dirty="0"/>
-              <a:t>Werken met Input Action</a:t>
-            </a:r>
-            <a:endParaRPr lang="en-US" dirty="0"/>
-          </a:p>
-        </p:txBody>
-      </p:sp>
-    </p:spTree>
-    <p:extLst>
-      <p:ext uri="{BB962C8B-B14F-4D97-AF65-F5344CB8AC3E}">
-        <p14:creationId xmlns:p14="http://schemas.microsoft.com/office/powerpoint/2010/main" val="542638257"/>
-      </p:ext>
-    </p:extLst>
-  </p:cSld>
-  <p:clrMapOvr>
-    <a:masterClrMapping/>
-  </p:clrMapOvr>
-</p:sld>
-</file>
-
-<file path=ppt/slides/slide20.xml><?xml version="1.0" encoding="utf-8"?>
+<file path=ppt/slides/slide21.xml><?xml version="1.0" encoding="utf-8"?>
 <p:sld xmlns:a="http://schemas.openxmlformats.org/drawingml/2006/main" xmlns:r="http://schemas.openxmlformats.org/officeDocument/2006/relationships" xmlns:p="http://schemas.openxmlformats.org/presentationml/2006/main">
   <p:cSld>
     <p:spTree>
@@ -10834,7 +11226,7 @@
 </p:sld>
 </file>
 
-<file path=ppt/slides/slide21.xml><?xml version="1.0" encoding="utf-8"?>
+<file path=ppt/slides/slide22.xml><?xml version="1.0" encoding="utf-8"?>
 <p:sld xmlns:a="http://schemas.openxmlformats.org/drawingml/2006/main" xmlns:r="http://schemas.openxmlformats.org/officeDocument/2006/relationships" xmlns:p="http://schemas.openxmlformats.org/presentationml/2006/main">
   <p:cSld>
     <p:bg>
@@ -11271,7 +11663,7 @@
 </p:sld>
 </file>
 
-<file path=ppt/slides/slide22.xml><?xml version="1.0" encoding="utf-8"?>
+<file path=ppt/slides/slide23.xml><?xml version="1.0" encoding="utf-8"?>
 <p:sld xmlns:a="http://schemas.openxmlformats.org/drawingml/2006/main" xmlns:r="http://schemas.openxmlformats.org/officeDocument/2006/relationships" xmlns:p="http://schemas.openxmlformats.org/presentationml/2006/main">
   <p:cSld>
     <p:bg>
@@ -11751,7 +12143,7 @@
 </p:sld>
 </file>
 
-<file path=ppt/slides/slide23.xml><?xml version="1.0" encoding="utf-8"?>
+<file path=ppt/slides/slide24.xml><?xml version="1.0" encoding="utf-8"?>
 <p:sld xmlns:a="http://schemas.openxmlformats.org/drawingml/2006/main" xmlns:r="http://schemas.openxmlformats.org/officeDocument/2006/relationships" xmlns:p="http://schemas.openxmlformats.org/presentationml/2006/main">
   <p:cSld>
     <p:bg>
@@ -11951,7 +12343,7 @@
 </p:sld>
 </file>
 
-<file path=ppt/slides/slide24.xml><?xml version="1.0" encoding="utf-8"?>
+<file path=ppt/slides/slide25.xml><?xml version="1.0" encoding="utf-8"?>
 <p:sld xmlns:a="http://schemas.openxmlformats.org/drawingml/2006/main" xmlns:r="http://schemas.openxmlformats.org/officeDocument/2006/relationships" xmlns:p="http://schemas.openxmlformats.org/presentationml/2006/main">
   <p:cSld>
     <p:bg>
@@ -13850,7 +14242,7 @@
 </p:sld>
 </file>
 
-<file path=ppt/slides/slide25.xml><?xml version="1.0" encoding="utf-8"?>
+<file path=ppt/slides/slide26.xml><?xml version="1.0" encoding="utf-8"?>
 <p:sld xmlns:a="http://schemas.openxmlformats.org/drawingml/2006/main" xmlns:r="http://schemas.openxmlformats.org/officeDocument/2006/relationships" xmlns:p="http://schemas.openxmlformats.org/presentationml/2006/main">
   <p:cSld>
     <p:bg>
@@ -14180,7 +14572,7 @@
 </p:sld>
 </file>
 
-<file path=ppt/slides/slide26.xml><?xml version="1.0" encoding="utf-8"?>
+<file path=ppt/slides/slide27.xml><?xml version="1.0" encoding="utf-8"?>
 <p:sld xmlns:a="http://schemas.openxmlformats.org/drawingml/2006/main" xmlns:r="http://schemas.openxmlformats.org/officeDocument/2006/relationships" xmlns:p="http://schemas.openxmlformats.org/presentationml/2006/main">
   <p:cSld>
     <p:bg>
@@ -14400,7 +14792,7 @@
 </p:sld>
 </file>
 
-<file path=ppt/slides/slide27.xml><?xml version="1.0" encoding="utf-8"?>
+<file path=ppt/slides/slide28.xml><?xml version="1.0" encoding="utf-8"?>
 <p:sld xmlns:a="http://schemas.openxmlformats.org/drawingml/2006/main" xmlns:r="http://schemas.openxmlformats.org/officeDocument/2006/relationships" xmlns:p="http://schemas.openxmlformats.org/presentationml/2006/main">
   <p:cSld>
     <p:spTree>
@@ -14502,7 +14894,7 @@
 </p:sld>
 </file>
 
-<file path=ppt/slides/slide28.xml><?xml version="1.0" encoding="utf-8"?>
+<file path=ppt/slides/slide29.xml><?xml version="1.0" encoding="utf-8"?>
 <p:sld xmlns:a="http://schemas.openxmlformats.org/drawingml/2006/main" xmlns:r="http://schemas.openxmlformats.org/officeDocument/2006/relationships" xmlns:p="http://schemas.openxmlformats.org/presentationml/2006/main">
   <p:cSld>
     <p:bg>
@@ -15872,7 +16264,7 @@
               <a:buNone/>
             </a:pPr>
             <a:r>
-              <a:rPr lang="en-US" sz="2000" kern="1200">
+              <a:rPr lang="en-US" sz="2000" kern="1200" dirty="0">
                 <a:solidFill>
                   <a:schemeClr val="tx1"/>
                 </a:solidFill>
@@ -15880,7 +16272,104 @@
                 <a:ea typeface="+mn-ea"/>
                 <a:cs typeface="+mn-cs"/>
               </a:rPr>
-              <a:t>Maak in de folder AMP een folder PreFab en een Folder Excercise1</a:t>
+              <a:t>Maak in de folder AMP </a:t>
+            </a:r>
+            <a:r>
+              <a:rPr lang="en-US" sz="2000" kern="1200" dirty="0" err="1">
+                <a:solidFill>
+                  <a:schemeClr val="tx1"/>
+                </a:solidFill>
+                <a:latin typeface="+mn-lt"/>
+                <a:ea typeface="+mn-ea"/>
+                <a:cs typeface="+mn-cs"/>
+              </a:rPr>
+              <a:t>een</a:t>
+            </a:r>
+            <a:r>
+              <a:rPr lang="en-US" sz="2000" kern="1200" dirty="0">
+                <a:solidFill>
+                  <a:schemeClr val="tx1"/>
+                </a:solidFill>
+                <a:latin typeface="+mn-lt"/>
+                <a:ea typeface="+mn-ea"/>
+                <a:cs typeface="+mn-cs"/>
+              </a:rPr>
+              <a:t> folder </a:t>
+            </a:r>
+            <a:r>
+              <a:rPr lang="en-US" sz="2000" kern="1200" dirty="0" err="1">
+                <a:solidFill>
+                  <a:schemeClr val="tx1"/>
+                </a:solidFill>
+                <a:latin typeface="Courier New" panose="02070309020205020404" pitchFamily="49" charset="0"/>
+                <a:cs typeface="Courier New" panose="02070309020205020404" pitchFamily="49" charset="0"/>
+              </a:rPr>
+              <a:t>PreFab</a:t>
+            </a:r>
+            <a:r>
+              <a:rPr lang="en-US" sz="2000" kern="1200" dirty="0">
+                <a:solidFill>
+                  <a:schemeClr val="tx1"/>
+                </a:solidFill>
+                <a:latin typeface="+mn-lt"/>
+                <a:ea typeface="+mn-ea"/>
+                <a:cs typeface="+mn-cs"/>
+              </a:rPr>
+              <a:t> </a:t>
+            </a:r>
+            <a:r>
+              <a:rPr lang="en-US" sz="2000" kern="1200" dirty="0" err="1">
+                <a:solidFill>
+                  <a:schemeClr val="tx1"/>
+                </a:solidFill>
+                <a:latin typeface="+mn-lt"/>
+                <a:ea typeface="+mn-ea"/>
+                <a:cs typeface="+mn-cs"/>
+              </a:rPr>
+              <a:t>en</a:t>
+            </a:r>
+            <a:r>
+              <a:rPr lang="en-US" sz="2000" kern="1200" dirty="0">
+                <a:solidFill>
+                  <a:schemeClr val="tx1"/>
+                </a:solidFill>
+                <a:latin typeface="+mn-lt"/>
+                <a:ea typeface="+mn-ea"/>
+                <a:cs typeface="+mn-cs"/>
+              </a:rPr>
+              <a:t> </a:t>
+            </a:r>
+            <a:r>
+              <a:rPr lang="en-US" sz="2000" kern="1200" dirty="0" err="1">
+                <a:solidFill>
+                  <a:schemeClr val="tx1"/>
+                </a:solidFill>
+                <a:latin typeface="+mn-lt"/>
+                <a:ea typeface="+mn-ea"/>
+                <a:cs typeface="+mn-cs"/>
+              </a:rPr>
+              <a:t>een</a:t>
+            </a:r>
+            <a:r>
+              <a:rPr lang="en-US" sz="2000" kern="1200" dirty="0">
+                <a:solidFill>
+                  <a:schemeClr val="tx1"/>
+                </a:solidFill>
+                <a:latin typeface="+mn-lt"/>
+                <a:ea typeface="+mn-ea"/>
+                <a:cs typeface="+mn-cs"/>
+              </a:rPr>
+              <a:t> Folder </a:t>
+            </a:r>
+            <a:r>
+              <a:rPr lang="en-US" sz="2000" kern="1200" dirty="0">
+                <a:solidFill>
+                  <a:schemeClr val="tx1"/>
+                </a:solidFill>
+                <a:latin typeface="Courier New" panose="02070309020205020404" pitchFamily="49" charset="0"/>
+                <a:cs typeface="Courier New" panose="02070309020205020404" pitchFamily="49" charset="0"/>
+              </a:rPr>
+              <a:t>Excercise1</a:t>
             </a:r>
           </a:p>
         </p:txBody>
@@ -16444,16 +16933,58 @@
               <a:buNone/>
             </a:pPr>
             <a:r>
-              <a:rPr lang="nl-NL" sz="2000"/>
-              <a:t>We gaan nu eerst een PreFab van een DraggablePoint maken</a:t>
-            </a:r>
-          </a:p>
-          <a:p>
-            <a:r>
-              <a:rPr lang="nl-NL" sz="2000"/>
-              <a:t>Maak in de Hierarchy een 2D-Sprite circle met als naam DraggablePoint</a:t>
-            </a:r>
-            <a:endParaRPr lang="en-US" sz="2000"/>
+              <a:rPr lang="nl-NL" sz="2000" dirty="0"/>
+              <a:t>We gaan nu eerst een </a:t>
+            </a:r>
+            <a:r>
+              <a:rPr lang="nl-NL" sz="2000" dirty="0" err="1"/>
+              <a:t>PreFab</a:t>
+            </a:r>
+            <a:r>
+              <a:rPr lang="nl-NL" sz="2000" dirty="0"/>
+              <a:t> van een </a:t>
+            </a:r>
+            <a:r>
+              <a:rPr lang="nl-NL" sz="2000" dirty="0" err="1"/>
+              <a:t>DraggablePoint</a:t>
+            </a:r>
+            <a:r>
+              <a:rPr lang="nl-NL" sz="2000" dirty="0"/>
+              <a:t> maken</a:t>
+            </a:r>
+          </a:p>
+          <a:p>
+            <a:r>
+              <a:rPr lang="nl-NL" sz="2000" dirty="0"/>
+              <a:t>Maak in de </a:t>
+            </a:r>
+            <a:r>
+              <a:rPr lang="nl-NL" sz="2000" dirty="0" err="1"/>
+              <a:t>Hierarchy</a:t>
+            </a:r>
+            <a:r>
+              <a:rPr lang="nl-NL" sz="2000" dirty="0"/>
+              <a:t> een 2D-Sprite </a:t>
+            </a:r>
+            <a:r>
+              <a:rPr lang="nl-NL" sz="2000" dirty="0" err="1"/>
+              <a:t>circle</a:t>
+            </a:r>
+            <a:r>
+              <a:rPr lang="nl-NL" sz="2000" dirty="0"/>
+              <a:t> met als naam </a:t>
+            </a:r>
+            <a:r>
+              <a:rPr lang="nl-NL" sz="2000" dirty="0" err="1">
+                <a:latin typeface="Courier New" panose="02070309020205020404" pitchFamily="49" charset="0"/>
+                <a:cs typeface="Courier New" panose="02070309020205020404" pitchFamily="49" charset="0"/>
+              </a:rPr>
+              <a:t>DraggablePoint</a:t>
+            </a:r>
+            <a:endParaRPr lang="en-US" sz="2000" dirty="0">
+              <a:latin typeface="Courier New" panose="02070309020205020404" pitchFamily="49" charset="0"/>
+              <a:cs typeface="Courier New" panose="02070309020205020404" pitchFamily="49" charset="0"/>
+            </a:endParaRPr>
           </a:p>
         </p:txBody>
       </p:sp>
